--- a/dev/slides/01-from_tests_to_models.pptx
+++ b/dev/slides/01-from_tests_to_models.pptx
@@ -6,27 +6,28 @@
   </p:sldMasterIdLst>
   <p:sldIdLst>
     <p:sldId id="256" r:id="rId2"/>
-    <p:sldId id="257" r:id="rId3"/>
-    <p:sldId id="258" r:id="rId4"/>
-    <p:sldId id="259" r:id="rId5"/>
-    <p:sldId id="260" r:id="rId6"/>
-    <p:sldId id="261" r:id="rId7"/>
-    <p:sldId id="262" r:id="rId8"/>
-    <p:sldId id="264" r:id="rId9"/>
-    <p:sldId id="266" r:id="rId10"/>
-    <p:sldId id="265" r:id="rId11"/>
-    <p:sldId id="267" r:id="rId12"/>
-    <p:sldId id="268" r:id="rId13"/>
-    <p:sldId id="269" r:id="rId14"/>
-    <p:sldId id="270" r:id="rId15"/>
-    <p:sldId id="271" r:id="rId16"/>
-    <p:sldId id="272" r:id="rId17"/>
-    <p:sldId id="273" r:id="rId18"/>
-    <p:sldId id="274" r:id="rId19"/>
-    <p:sldId id="275" r:id="rId20"/>
-    <p:sldId id="276" r:id="rId21"/>
-    <p:sldId id="278" r:id="rId22"/>
-    <p:sldId id="277" r:id="rId23"/>
+    <p:sldId id="279" r:id="rId3"/>
+    <p:sldId id="257" r:id="rId4"/>
+    <p:sldId id="258" r:id="rId5"/>
+    <p:sldId id="259" r:id="rId6"/>
+    <p:sldId id="260" r:id="rId7"/>
+    <p:sldId id="261" r:id="rId8"/>
+    <p:sldId id="262" r:id="rId9"/>
+    <p:sldId id="264" r:id="rId10"/>
+    <p:sldId id="266" r:id="rId11"/>
+    <p:sldId id="265" r:id="rId12"/>
+    <p:sldId id="267" r:id="rId13"/>
+    <p:sldId id="268" r:id="rId14"/>
+    <p:sldId id="269" r:id="rId15"/>
+    <p:sldId id="270" r:id="rId16"/>
+    <p:sldId id="271" r:id="rId17"/>
+    <p:sldId id="272" r:id="rId18"/>
+    <p:sldId id="273" r:id="rId19"/>
+    <p:sldId id="274" r:id="rId20"/>
+    <p:sldId id="275" r:id="rId21"/>
+    <p:sldId id="276" r:id="rId22"/>
+    <p:sldId id="278" r:id="rId23"/>
+    <p:sldId id="277" r:id="rId24"/>
   </p:sldIdLst>
   <p:sldSz cx="12192000" cy="6858000"/>
   <p:notesSz cx="6858000" cy="9144000"/>
@@ -900,7 +901,7 @@
           <a:p>
             <a:fld id="{20EE51CD-FA5F-4881-9B4A-09B6BA8C5811}" type="datetimeFigureOut">
               <a:rPr lang="en-NZ" smtClean="0"/>
-              <a:t>6/03/2026</a:t>
+              <a:t>16/03/2026</a:t>
             </a:fld>
             <a:endParaRPr lang="en-NZ"/>
           </a:p>
@@ -1100,7 +1101,7 @@
           <a:p>
             <a:fld id="{20EE51CD-FA5F-4881-9B4A-09B6BA8C5811}" type="datetimeFigureOut">
               <a:rPr lang="en-NZ" smtClean="0"/>
-              <a:t>6/03/2026</a:t>
+              <a:t>16/03/2026</a:t>
             </a:fld>
             <a:endParaRPr lang="en-NZ"/>
           </a:p>
@@ -1310,7 +1311,7 @@
           <a:p>
             <a:fld id="{20EE51CD-FA5F-4881-9B4A-09B6BA8C5811}" type="datetimeFigureOut">
               <a:rPr lang="en-NZ" smtClean="0"/>
-              <a:t>6/03/2026</a:t>
+              <a:t>16/03/2026</a:t>
             </a:fld>
             <a:endParaRPr lang="en-NZ"/>
           </a:p>
@@ -1510,7 +1511,7 @@
           <a:p>
             <a:fld id="{20EE51CD-FA5F-4881-9B4A-09B6BA8C5811}" type="datetimeFigureOut">
               <a:rPr lang="en-NZ" smtClean="0"/>
-              <a:t>6/03/2026</a:t>
+              <a:t>16/03/2026</a:t>
             </a:fld>
             <a:endParaRPr lang="en-NZ"/>
           </a:p>
@@ -1786,7 +1787,7 @@
           <a:p>
             <a:fld id="{20EE51CD-FA5F-4881-9B4A-09B6BA8C5811}" type="datetimeFigureOut">
               <a:rPr lang="en-NZ" smtClean="0"/>
-              <a:t>6/03/2026</a:t>
+              <a:t>16/03/2026</a:t>
             </a:fld>
             <a:endParaRPr lang="en-NZ"/>
           </a:p>
@@ -2054,7 +2055,7 @@
           <a:p>
             <a:fld id="{20EE51CD-FA5F-4881-9B4A-09B6BA8C5811}" type="datetimeFigureOut">
               <a:rPr lang="en-NZ" smtClean="0"/>
-              <a:t>6/03/2026</a:t>
+              <a:t>16/03/2026</a:t>
             </a:fld>
             <a:endParaRPr lang="en-NZ"/>
           </a:p>
@@ -2469,7 +2470,7 @@
           <a:p>
             <a:fld id="{20EE51CD-FA5F-4881-9B4A-09B6BA8C5811}" type="datetimeFigureOut">
               <a:rPr lang="en-NZ" smtClean="0"/>
-              <a:t>6/03/2026</a:t>
+              <a:t>16/03/2026</a:t>
             </a:fld>
             <a:endParaRPr lang="en-NZ"/>
           </a:p>
@@ -2611,7 +2612,7 @@
           <a:p>
             <a:fld id="{20EE51CD-FA5F-4881-9B4A-09B6BA8C5811}" type="datetimeFigureOut">
               <a:rPr lang="en-NZ" smtClean="0"/>
-              <a:t>6/03/2026</a:t>
+              <a:t>16/03/2026</a:t>
             </a:fld>
             <a:endParaRPr lang="en-NZ"/>
           </a:p>
@@ -2724,7 +2725,7 @@
           <a:p>
             <a:fld id="{20EE51CD-FA5F-4881-9B4A-09B6BA8C5811}" type="datetimeFigureOut">
               <a:rPr lang="en-NZ" smtClean="0"/>
-              <a:t>6/03/2026</a:t>
+              <a:t>16/03/2026</a:t>
             </a:fld>
             <a:endParaRPr lang="en-NZ"/>
           </a:p>
@@ -3037,7 +3038,7 @@
           <a:p>
             <a:fld id="{20EE51CD-FA5F-4881-9B4A-09B6BA8C5811}" type="datetimeFigureOut">
               <a:rPr lang="en-NZ" smtClean="0"/>
-              <a:t>6/03/2026</a:t>
+              <a:t>16/03/2026</a:t>
             </a:fld>
             <a:endParaRPr lang="en-NZ"/>
           </a:p>
@@ -3326,7 +3327,7 @@
           <a:p>
             <a:fld id="{20EE51CD-FA5F-4881-9B4A-09B6BA8C5811}" type="datetimeFigureOut">
               <a:rPr lang="en-NZ" smtClean="0"/>
-              <a:t>6/03/2026</a:t>
+              <a:t>16/03/2026</a:t>
             </a:fld>
             <a:endParaRPr lang="en-NZ"/>
           </a:p>
@@ -3572,7 +3573,7 @@
           <a:p>
             <a:fld id="{20EE51CD-FA5F-4881-9B4A-09B6BA8C5811}" type="datetimeFigureOut">
               <a:rPr lang="en-NZ" smtClean="0"/>
-              <a:t>6/03/2026</a:t>
+              <a:t>16/03/2026</a:t>
             </a:fld>
             <a:endParaRPr lang="en-NZ"/>
           </a:p>
@@ -4042,6 +4043,376 @@
         <p:cNvPr id="1" name="">
           <a:extLst>
             <a:ext uri="{FF2B5EF4-FFF2-40B4-BE49-F238E27FC236}">
+              <a16:creationId xmlns:a16="http://schemas.microsoft.com/office/drawing/2014/main" id="{393621E9-6DF9-DACC-F97E-AF4379D1F12F}"/>
+            </a:ext>
+          </a:extLst>
+        </p:cNvPr>
+        <p:cNvGrpSpPr/>
+        <p:nvPr/>
+      </p:nvGrpSpPr>
+      <p:grpSpPr>
+        <a:xfrm>
+          <a:off x="0" y="0"/>
+          <a:ext cx="0" cy="0"/>
+          <a:chOff x="0" y="0"/>
+          <a:chExt cx="0" cy="0"/>
+        </a:xfrm>
+      </p:grpSpPr>
+      <p:sp>
+        <p:nvSpPr>
+          <p:cNvPr id="2" name="Title 1">
+            <a:extLst>
+              <a:ext uri="{FF2B5EF4-FFF2-40B4-BE49-F238E27FC236}">
+                <a16:creationId xmlns:a16="http://schemas.microsoft.com/office/drawing/2014/main" id="{736A8B86-9439-166D-BACE-1A398662A157}"/>
+              </a:ext>
+            </a:extLst>
+          </p:cNvPr>
+          <p:cNvSpPr>
+            <a:spLocks noGrp="1"/>
+          </p:cNvSpPr>
+          <p:nvPr>
+            <p:ph type="title"/>
+          </p:nvPr>
+        </p:nvSpPr>
+        <p:spPr/>
+        <p:txBody>
+          <a:bodyPr/>
+          <a:lstStyle/>
+          <a:p>
+            <a:r>
+              <a:rPr lang="en-NZ" dirty="0">
+                <a:solidFill>
+                  <a:schemeClr val="bg1"/>
+                </a:solidFill>
+              </a:rPr>
+              <a:t>Why Variance</a:t>
+            </a:r>
+          </a:p>
+        </p:txBody>
+      </p:sp>
+      <p:sp>
+        <p:nvSpPr>
+          <p:cNvPr id="5" name="Content Placeholder 4">
+            <a:extLst>
+              <a:ext uri="{FF2B5EF4-FFF2-40B4-BE49-F238E27FC236}">
+                <a16:creationId xmlns:a16="http://schemas.microsoft.com/office/drawing/2014/main" id="{5ECC9EB3-2713-F476-71D8-6CAC591B3FB4}"/>
+              </a:ext>
+            </a:extLst>
+          </p:cNvPr>
+          <p:cNvSpPr>
+            <a:spLocks noGrp="1"/>
+          </p:cNvSpPr>
+          <p:nvPr>
+            <p:ph idx="1"/>
+          </p:nvPr>
+        </p:nvSpPr>
+        <p:spPr>
+          <a:xfrm>
+            <a:off x="838200" y="1320800"/>
+            <a:ext cx="10515600" cy="624967"/>
+          </a:xfrm>
+        </p:spPr>
+        <p:txBody>
+          <a:bodyPr/>
+          <a:lstStyle/>
+          <a:p>
+            <a:r>
+              <a:rPr lang="en-NZ" dirty="0">
+                <a:solidFill>
+                  <a:schemeClr val="bg1"/>
+                </a:solidFill>
+              </a:rPr>
+              <a:t>Why do we use analysis of variance to test a difference in means?</a:t>
+            </a:r>
+          </a:p>
+        </p:txBody>
+      </p:sp>
+      <p:grpSp>
+        <p:nvGrpSpPr>
+          <p:cNvPr id="12" name="Group 11">
+            <a:extLst>
+              <a:ext uri="{FF2B5EF4-FFF2-40B4-BE49-F238E27FC236}">
+                <a16:creationId xmlns:a16="http://schemas.microsoft.com/office/drawing/2014/main" id="{ACC654DF-98CF-34CB-EA79-2E27D5707229}"/>
+              </a:ext>
+            </a:extLst>
+          </p:cNvPr>
+          <p:cNvGrpSpPr/>
+          <p:nvPr/>
+        </p:nvGrpSpPr>
+        <p:grpSpPr>
+          <a:xfrm>
+            <a:off x="1282001" y="1945767"/>
+            <a:ext cx="4635373" cy="4848004"/>
+            <a:chOff x="3778313" y="1945767"/>
+            <a:chExt cx="4635373" cy="4848004"/>
+          </a:xfrm>
+        </p:grpSpPr>
+        <p:pic>
+          <p:nvPicPr>
+            <p:cNvPr id="4" name="Graphic 3">
+              <a:extLst>
+                <a:ext uri="{FF2B5EF4-FFF2-40B4-BE49-F238E27FC236}">
+                  <a16:creationId xmlns:a16="http://schemas.microsoft.com/office/drawing/2014/main" id="{692AEC61-D23D-98B8-811B-0832EF86EE04}"/>
+                </a:ext>
+              </a:extLst>
+            </p:cNvPr>
+            <p:cNvPicPr>
+              <a:picLocks noChangeAspect="1"/>
+            </p:cNvPicPr>
+            <p:nvPr/>
+          </p:nvPicPr>
+          <p:blipFill>
+            <a:blip r:embed="rId2">
+              <a:extLst>
+                <a:ext uri="{96DAC541-7B7A-43D3-8B79-37D633B846F1}">
+                  <asvg:svgBlip xmlns:asvg="http://schemas.microsoft.com/office/drawing/2016/SVG/main" r:embed="rId3"/>
+                </a:ext>
+              </a:extLst>
+            </a:blip>
+            <a:stretch>
+              <a:fillRect/>
+            </a:stretch>
+          </p:blipFill>
+          <p:spPr>
+            <a:xfrm>
+              <a:off x="3778313" y="1945767"/>
+              <a:ext cx="4635373" cy="4848004"/>
+            </a:xfrm>
+            <a:prstGeom prst="rect">
+              <a:avLst/>
+            </a:prstGeom>
+          </p:spPr>
+        </p:pic>
+        <p:cxnSp>
+          <p:nvCxnSpPr>
+            <p:cNvPr id="6" name="Straight Arrow Connector 5">
+              <a:extLst>
+                <a:ext uri="{FF2B5EF4-FFF2-40B4-BE49-F238E27FC236}">
+                  <a16:creationId xmlns:a16="http://schemas.microsoft.com/office/drawing/2014/main" id="{87A999BF-D377-4EE1-2654-D350F3578FD5}"/>
+                </a:ext>
+              </a:extLst>
+            </p:cNvPr>
+            <p:cNvCxnSpPr/>
+            <p:nvPr/>
+          </p:nvCxnSpPr>
+          <p:spPr>
+            <a:xfrm>
+              <a:off x="5219700" y="4448175"/>
+              <a:ext cx="685800" cy="0"/>
+            </a:xfrm>
+            <a:prstGeom prst="straightConnector1">
+              <a:avLst/>
+            </a:prstGeom>
+            <a:ln w="38100">
+              <a:solidFill>
+                <a:schemeClr val="accent4">
+                  <a:lumMod val="75000"/>
+                </a:schemeClr>
+              </a:solidFill>
+              <a:headEnd type="triangle"/>
+              <a:tailEnd type="triangle"/>
+            </a:ln>
+          </p:spPr>
+          <p:style>
+            <a:lnRef idx="2">
+              <a:schemeClr val="accent1"/>
+            </a:lnRef>
+            <a:fillRef idx="0">
+              <a:schemeClr val="accent1"/>
+            </a:fillRef>
+            <a:effectRef idx="1">
+              <a:schemeClr val="accent1"/>
+            </a:effectRef>
+            <a:fontRef idx="minor">
+              <a:schemeClr val="tx1"/>
+            </a:fontRef>
+          </p:style>
+        </p:cxnSp>
+        <p:cxnSp>
+          <p:nvCxnSpPr>
+            <p:cNvPr id="7" name="Straight Arrow Connector 6">
+              <a:extLst>
+                <a:ext uri="{FF2B5EF4-FFF2-40B4-BE49-F238E27FC236}">
+                  <a16:creationId xmlns:a16="http://schemas.microsoft.com/office/drawing/2014/main" id="{D78FE40F-181C-6C02-0FA8-DF933F103BB6}"/>
+                </a:ext>
+              </a:extLst>
+            </p:cNvPr>
+            <p:cNvCxnSpPr/>
+            <p:nvPr/>
+          </p:nvCxnSpPr>
+          <p:spPr>
+            <a:xfrm>
+              <a:off x="6496812" y="4448175"/>
+              <a:ext cx="685800" cy="0"/>
+            </a:xfrm>
+            <a:prstGeom prst="straightConnector1">
+              <a:avLst/>
+            </a:prstGeom>
+            <a:ln w="38100">
+              <a:solidFill>
+                <a:srgbClr val="0070C0"/>
+              </a:solidFill>
+              <a:headEnd type="triangle"/>
+              <a:tailEnd type="triangle"/>
+            </a:ln>
+          </p:spPr>
+          <p:style>
+            <a:lnRef idx="2">
+              <a:schemeClr val="accent1"/>
+            </a:lnRef>
+            <a:fillRef idx="0">
+              <a:schemeClr val="accent1"/>
+            </a:fillRef>
+            <a:effectRef idx="1">
+              <a:schemeClr val="accent1"/>
+            </a:effectRef>
+            <a:fontRef idx="minor">
+              <a:schemeClr val="tx1"/>
+            </a:fontRef>
+          </p:style>
+        </p:cxnSp>
+        <p:cxnSp>
+          <p:nvCxnSpPr>
+            <p:cNvPr id="8" name="Straight Arrow Connector 7">
+              <a:extLst>
+                <a:ext uri="{FF2B5EF4-FFF2-40B4-BE49-F238E27FC236}">
+                  <a16:creationId xmlns:a16="http://schemas.microsoft.com/office/drawing/2014/main" id="{2BEE77A4-3597-7562-266C-2DDB4A6BF93D}"/>
+                </a:ext>
+              </a:extLst>
+            </p:cNvPr>
+            <p:cNvCxnSpPr>
+              <a:cxnSpLocks/>
+            </p:cNvCxnSpPr>
+            <p:nvPr/>
+          </p:nvCxnSpPr>
+          <p:spPr>
+            <a:xfrm>
+              <a:off x="5562600" y="2159127"/>
+              <a:ext cx="1277112" cy="0"/>
+            </a:xfrm>
+            <a:prstGeom prst="straightConnector1">
+              <a:avLst/>
+            </a:prstGeom>
+            <a:ln w="38100">
+              <a:solidFill>
+                <a:schemeClr val="accent2">
+                  <a:lumMod val="75000"/>
+                </a:schemeClr>
+              </a:solidFill>
+              <a:headEnd type="triangle"/>
+              <a:tailEnd type="triangle"/>
+            </a:ln>
+          </p:spPr>
+          <p:style>
+            <a:lnRef idx="2">
+              <a:schemeClr val="accent1"/>
+            </a:lnRef>
+            <a:fillRef idx="0">
+              <a:schemeClr val="accent1"/>
+            </a:fillRef>
+            <a:effectRef idx="1">
+              <a:schemeClr val="accent1"/>
+            </a:effectRef>
+            <a:fontRef idx="minor">
+              <a:schemeClr val="tx1"/>
+            </a:fontRef>
+          </p:style>
+        </p:cxnSp>
+      </p:grpSp>
+      <p:sp>
+        <p:nvSpPr>
+          <p:cNvPr id="11" name="TextBox 10">
+            <a:extLst>
+              <a:ext uri="{FF2B5EF4-FFF2-40B4-BE49-F238E27FC236}">
+                <a16:creationId xmlns:a16="http://schemas.microsoft.com/office/drawing/2014/main" id="{42FD80DD-1212-D670-2F62-0D87C16BE73E}"/>
+              </a:ext>
+            </a:extLst>
+          </p:cNvPr>
+          <p:cNvSpPr txBox="1"/>
+          <p:nvPr/>
+        </p:nvSpPr>
+        <p:spPr>
+          <a:xfrm>
+            <a:off x="6274627" y="1945767"/>
+            <a:ext cx="5522973" cy="923330"/>
+          </a:xfrm>
+          <a:prstGeom prst="rect">
+            <a:avLst/>
+          </a:prstGeom>
+          <a:noFill/>
+        </p:spPr>
+        <p:txBody>
+          <a:bodyPr wrap="square" rtlCol="0">
+            <a:spAutoFit/>
+          </a:bodyPr>
+          <a:lstStyle/>
+          <a:p>
+            <a:r>
+              <a:rPr lang="en-NZ" dirty="0">
+                <a:solidFill>
+                  <a:schemeClr val="bg1"/>
+                </a:solidFill>
+              </a:rPr>
+              <a:t>If </a:t>
+            </a:r>
+            <a:r>
+              <a:rPr lang="en-NZ" dirty="0">
+                <a:solidFill>
+                  <a:schemeClr val="accent2">
+                    <a:lumMod val="75000"/>
+                  </a:schemeClr>
+                </a:solidFill>
+              </a:rPr>
+              <a:t>variance between groups </a:t>
+            </a:r>
+            <a:r>
+              <a:rPr lang="en-NZ" dirty="0">
+                <a:solidFill>
+                  <a:schemeClr val="bg1"/>
+                </a:solidFill>
+              </a:rPr>
+              <a:t>is higher than </a:t>
+            </a:r>
+            <a:r>
+              <a:rPr lang="en-NZ" dirty="0">
+                <a:solidFill>
+                  <a:srgbClr val="0070C0"/>
+                </a:solidFill>
+              </a:rPr>
+              <a:t>variance within groups</a:t>
+            </a:r>
+            <a:r>
+              <a:rPr lang="en-NZ" dirty="0">
+                <a:solidFill>
+                  <a:schemeClr val="bg1"/>
+                </a:solidFill>
+              </a:rPr>
+              <a:t>, then the observations are likely drawn from two different distributions</a:t>
+            </a:r>
+          </a:p>
+        </p:txBody>
+      </p:sp>
+    </p:spTree>
+    <p:extLst>
+      <p:ext uri="{BB962C8B-B14F-4D97-AF65-F5344CB8AC3E}">
+        <p14:creationId xmlns:p14="http://schemas.microsoft.com/office/powerpoint/2010/main" val="568599909"/>
+      </p:ext>
+    </p:extLst>
+  </p:cSld>
+  <p:clrMapOvr>
+    <a:masterClrMapping/>
+  </p:clrMapOvr>
+</p:sld>
+</file>
+
+<file path=ppt/slides/slide11.xml><?xml version="1.0" encoding="utf-8"?>
+<p:sld xmlns:a="http://schemas.openxmlformats.org/drawingml/2006/main" xmlns:r="http://schemas.openxmlformats.org/officeDocument/2006/relationships" xmlns:p="http://schemas.openxmlformats.org/presentationml/2006/main">
+  <p:cSld>
+    <p:spTree>
+      <p:nvGrpSpPr>
+        <p:cNvPr id="1" name="">
+          <a:extLst>
+            <a:ext uri="{FF2B5EF4-FFF2-40B4-BE49-F238E27FC236}">
               <a16:creationId xmlns:a16="http://schemas.microsoft.com/office/drawing/2014/main" id="{C1325E60-BB87-704D-7DC8-3B6BC659C678}"/>
             </a:ext>
           </a:extLst>
@@ -4375,7 +4746,7 @@
 </p:sld>
 </file>
 
-<file path=ppt/slides/slide11.xml><?xml version="1.0" encoding="utf-8"?>
+<file path=ppt/slides/slide12.xml><?xml version="1.0" encoding="utf-8"?>
 <p:sld xmlns:a="http://schemas.openxmlformats.org/drawingml/2006/main" xmlns:r="http://schemas.openxmlformats.org/officeDocument/2006/relationships" xmlns:p="http://schemas.openxmlformats.org/presentationml/2006/main">
   <p:cSld>
     <p:spTree>
@@ -5300,7 +5671,7 @@
 </p:sld>
 </file>
 
-<file path=ppt/slides/slide12.xml><?xml version="1.0" encoding="utf-8"?>
+<file path=ppt/slides/slide13.xml><?xml version="1.0" encoding="utf-8"?>
 <p:sld xmlns:a="http://schemas.openxmlformats.org/drawingml/2006/main" xmlns:r="http://schemas.openxmlformats.org/officeDocument/2006/relationships" xmlns:p="http://schemas.openxmlformats.org/presentationml/2006/main">
   <p:cSld>
     <p:spTree>
@@ -6030,7 +6401,7 @@
 </p:sld>
 </file>
 
-<file path=ppt/slides/slide13.xml><?xml version="1.0" encoding="utf-8"?>
+<file path=ppt/slides/slide14.xml><?xml version="1.0" encoding="utf-8"?>
 <p:sld xmlns:a="http://schemas.openxmlformats.org/drawingml/2006/main" xmlns:r="http://schemas.openxmlformats.org/officeDocument/2006/relationships" xmlns:p="http://schemas.openxmlformats.org/presentationml/2006/main">
   <p:cSld>
     <p:spTree>
@@ -6133,7 +6504,7 @@
 </p:sld>
 </file>
 
-<file path=ppt/slides/slide14.xml><?xml version="1.0" encoding="utf-8"?>
+<file path=ppt/slides/slide15.xml><?xml version="1.0" encoding="utf-8"?>
 <p:sld xmlns:a="http://schemas.openxmlformats.org/drawingml/2006/main" xmlns:r="http://schemas.openxmlformats.org/officeDocument/2006/relationships" xmlns:p="http://schemas.openxmlformats.org/presentationml/2006/main">
   <p:cSld>
     <p:spTree>
@@ -6272,7 +6643,7 @@
 </p:sld>
 </file>
 
-<file path=ppt/slides/slide15.xml><?xml version="1.0" encoding="utf-8"?>
+<file path=ppt/slides/slide16.xml><?xml version="1.0" encoding="utf-8"?>
 <p:sld xmlns:a="http://schemas.openxmlformats.org/drawingml/2006/main" xmlns:r="http://schemas.openxmlformats.org/officeDocument/2006/relationships" xmlns:p="http://schemas.openxmlformats.org/presentationml/2006/main">
   <p:cSld>
     <p:spTree>
@@ -6425,7 +6796,7 @@
 </p:sld>
 </file>
 
-<file path=ppt/slides/slide16.xml><?xml version="1.0" encoding="utf-8"?>
+<file path=ppt/slides/slide17.xml><?xml version="1.0" encoding="utf-8"?>
 <p:sld xmlns:a="http://schemas.openxmlformats.org/drawingml/2006/main" xmlns:r="http://schemas.openxmlformats.org/officeDocument/2006/relationships" xmlns:p="http://schemas.openxmlformats.org/presentationml/2006/main">
   <p:cSld>
     <p:spTree>
@@ -7002,7 +7373,7 @@
 </p:sld>
 </file>
 
-<file path=ppt/slides/slide17.xml><?xml version="1.0" encoding="utf-8"?>
+<file path=ppt/slides/slide18.xml><?xml version="1.0" encoding="utf-8"?>
 <p:sld xmlns:a="http://schemas.openxmlformats.org/drawingml/2006/main" xmlns:r="http://schemas.openxmlformats.org/officeDocument/2006/relationships" xmlns:p="http://schemas.openxmlformats.org/presentationml/2006/main">
   <p:cSld>
     <p:spTree>
@@ -7674,7 +8045,7 @@
 </p:sld>
 </file>
 
-<file path=ppt/slides/slide18.xml><?xml version="1.0" encoding="utf-8"?>
+<file path=ppt/slides/slide19.xml><?xml version="1.0" encoding="utf-8"?>
 <p:sld xmlns:a="http://schemas.openxmlformats.org/drawingml/2006/main" xmlns:r="http://schemas.openxmlformats.org/officeDocument/2006/relationships" xmlns:p="http://schemas.openxmlformats.org/presentationml/2006/main">
   <p:cSld>
     <p:spTree>
@@ -8484,7 +8855,238 @@
 </p:sld>
 </file>
 
-<file path=ppt/slides/slide19.xml><?xml version="1.0" encoding="utf-8"?>
+<file path=ppt/slides/slide2.xml><?xml version="1.0" encoding="utf-8"?>
+<p:sld xmlns:a="http://schemas.openxmlformats.org/drawingml/2006/main" xmlns:r="http://schemas.openxmlformats.org/officeDocument/2006/relationships" xmlns:p="http://schemas.openxmlformats.org/presentationml/2006/main">
+  <p:cSld>
+    <p:spTree>
+      <p:nvGrpSpPr>
+        <p:cNvPr id="1" name=""/>
+        <p:cNvGrpSpPr/>
+        <p:nvPr/>
+      </p:nvGrpSpPr>
+      <p:grpSpPr>
+        <a:xfrm>
+          <a:off x="0" y="0"/>
+          <a:ext cx="0" cy="0"/>
+          <a:chOff x="0" y="0"/>
+          <a:chExt cx="0" cy="0"/>
+        </a:xfrm>
+      </p:grpSpPr>
+      <p:grpSp>
+        <p:nvGrpSpPr>
+          <p:cNvPr id="10" name="Group 9">
+            <a:extLst>
+              <a:ext uri="{FF2B5EF4-FFF2-40B4-BE49-F238E27FC236}">
+                <a16:creationId xmlns:a16="http://schemas.microsoft.com/office/drawing/2014/main" id="{893F373E-A980-CEEF-706B-5B5288D43D09}"/>
+              </a:ext>
+            </a:extLst>
+          </p:cNvPr>
+          <p:cNvGrpSpPr/>
+          <p:nvPr/>
+        </p:nvGrpSpPr>
+        <p:grpSpPr>
+          <a:xfrm>
+            <a:off x="737616" y="1391334"/>
+            <a:ext cx="10716768" cy="4075331"/>
+            <a:chOff x="737616" y="1137196"/>
+            <a:chExt cx="10716768" cy="4075331"/>
+          </a:xfrm>
+        </p:grpSpPr>
+        <p:sp>
+          <p:nvSpPr>
+            <p:cNvPr id="5" name="TextBox 4">
+              <a:extLst>
+                <a:ext uri="{FF2B5EF4-FFF2-40B4-BE49-F238E27FC236}">
+                  <a16:creationId xmlns:a16="http://schemas.microsoft.com/office/drawing/2014/main" id="{BDDA2380-DFC7-8509-FC2F-1CD35BBBADE3}"/>
+                </a:ext>
+              </a:extLst>
+            </p:cNvPr>
+            <p:cNvSpPr txBox="1"/>
+            <p:nvPr/>
+          </p:nvSpPr>
+          <p:spPr>
+            <a:xfrm>
+              <a:off x="737616" y="1137196"/>
+              <a:ext cx="10716768" cy="923330"/>
+            </a:xfrm>
+            <a:prstGeom prst="rect">
+              <a:avLst/>
+            </a:prstGeom>
+            <a:noFill/>
+          </p:spPr>
+          <p:txBody>
+            <a:bodyPr wrap="square">
+              <a:spAutoFit/>
+            </a:bodyPr>
+            <a:lstStyle/>
+            <a:p>
+              <a:r>
+                <a:rPr lang="en-US" i="1" dirty="0">
+                  <a:solidFill>
+                    <a:schemeClr val="bg1"/>
+                  </a:solidFill>
+                </a:rPr>
+                <a:t>[…] much of the open science movement has been focused on misconduct and questionable-research-practices (like p-hacking), instead of research procedures like </a:t>
+              </a:r>
+              <a:r>
+                <a:rPr lang="en-US" b="1" i="1" dirty="0">
+                  <a:solidFill>
+                    <a:schemeClr val="bg1"/>
+                  </a:solidFill>
+                </a:rPr>
+                <a:t>data management and justification of modeling choices</a:t>
+              </a:r>
+              <a:r>
+                <a:rPr lang="en-US" i="1" dirty="0">
+                  <a:solidFill>
+                    <a:schemeClr val="bg1"/>
+                  </a:solidFill>
+                </a:rPr>
+                <a:t>. </a:t>
+              </a:r>
+              <a:endParaRPr lang="en-NZ" i="1" dirty="0">
+                <a:solidFill>
+                  <a:schemeClr val="bg1"/>
+                </a:solidFill>
+              </a:endParaRPr>
+            </a:p>
+          </p:txBody>
+        </p:sp>
+        <p:sp>
+          <p:nvSpPr>
+            <p:cNvPr id="7" name="TextBox 6">
+              <a:extLst>
+                <a:ext uri="{FF2B5EF4-FFF2-40B4-BE49-F238E27FC236}">
+                  <a16:creationId xmlns:a16="http://schemas.microsoft.com/office/drawing/2014/main" id="{ACF81962-CEED-4378-5672-32DC01C49D48}"/>
+                </a:ext>
+              </a:extLst>
+            </p:cNvPr>
+            <p:cNvSpPr txBox="1"/>
+            <p:nvPr/>
+          </p:nvSpPr>
+          <p:spPr>
+            <a:xfrm>
+              <a:off x="737616" y="2851696"/>
+              <a:ext cx="10716768" cy="646331"/>
+            </a:xfrm>
+            <a:prstGeom prst="rect">
+              <a:avLst/>
+            </a:prstGeom>
+            <a:noFill/>
+          </p:spPr>
+          <p:txBody>
+            <a:bodyPr wrap="square">
+              <a:spAutoFit/>
+            </a:bodyPr>
+            <a:lstStyle/>
+            <a:p>
+              <a:r>
+                <a:rPr lang="en-US" i="1" dirty="0">
+                  <a:solidFill>
+                    <a:schemeClr val="bg1"/>
+                  </a:solidFill>
+                </a:rPr>
+                <a:t>We need to define the phenomenon, the alternative explanations, and what estimates would help us </a:t>
+              </a:r>
+              <a:r>
+                <a:rPr lang="en-US" b="1" i="1" dirty="0">
+                  <a:solidFill>
+                    <a:schemeClr val="bg1"/>
+                  </a:solidFill>
+                </a:rPr>
+                <a:t>distinguish among them or refine them</a:t>
+              </a:r>
+              <a:r>
+                <a:rPr lang="en-US" i="1" dirty="0">
+                  <a:solidFill>
+                    <a:schemeClr val="bg1"/>
+                  </a:solidFill>
+                </a:rPr>
+                <a:t>.</a:t>
+              </a:r>
+              <a:endParaRPr lang="en-NZ" i="1" dirty="0">
+                <a:solidFill>
+                  <a:schemeClr val="bg1"/>
+                </a:solidFill>
+              </a:endParaRPr>
+            </a:p>
+          </p:txBody>
+        </p:sp>
+        <p:sp>
+          <p:nvSpPr>
+            <p:cNvPr id="9" name="TextBox 8">
+              <a:extLst>
+                <a:ext uri="{FF2B5EF4-FFF2-40B4-BE49-F238E27FC236}">
+                  <a16:creationId xmlns:a16="http://schemas.microsoft.com/office/drawing/2014/main" id="{AC2571C3-8BDC-AB7D-9C89-FB33DF2EF232}"/>
+                </a:ext>
+              </a:extLst>
+            </p:cNvPr>
+            <p:cNvSpPr txBox="1"/>
+            <p:nvPr/>
+          </p:nvSpPr>
+          <p:spPr>
+            <a:xfrm>
+              <a:off x="737616" y="4289197"/>
+              <a:ext cx="10716768" cy="923330"/>
+            </a:xfrm>
+            <a:prstGeom prst="rect">
+              <a:avLst/>
+            </a:prstGeom>
+            <a:noFill/>
+          </p:spPr>
+          <p:txBody>
+            <a:bodyPr wrap="square">
+              <a:spAutoFit/>
+            </a:bodyPr>
+            <a:lstStyle/>
+            <a:p>
+              <a:r>
+                <a:rPr lang="en-US" i="1" dirty="0">
+                  <a:solidFill>
+                    <a:schemeClr val="bg1"/>
+                  </a:solidFill>
+                </a:rPr>
+                <a:t>However, the biggest problem with Bayes factors is none of these. Rather it is that people want to use them to do null hypothesis testing, and testing null hypotheses is the fuel of the garbage fire in the first place. </a:t>
+              </a:r>
+              <a:r>
+                <a:rPr lang="en-US" b="1" i="1" dirty="0">
+                  <a:solidFill>
+                    <a:schemeClr val="bg1"/>
+                  </a:solidFill>
+                </a:rPr>
+                <a:t>Cumulative science needs non-null scientific models and ways to confront them with data</a:t>
+              </a:r>
+              <a:r>
+                <a:rPr lang="en-US" i="1" dirty="0">
+                  <a:solidFill>
+                    <a:schemeClr val="bg1"/>
+                  </a:solidFill>
+                </a:rPr>
+                <a:t>. </a:t>
+              </a:r>
+              <a:endParaRPr lang="en-NZ" i="1" dirty="0">
+                <a:solidFill>
+                  <a:schemeClr val="bg1"/>
+                </a:solidFill>
+              </a:endParaRPr>
+            </a:p>
+          </p:txBody>
+        </p:sp>
+      </p:grpSp>
+    </p:spTree>
+    <p:extLst>
+      <p:ext uri="{BB962C8B-B14F-4D97-AF65-F5344CB8AC3E}">
+        <p14:creationId xmlns:p14="http://schemas.microsoft.com/office/powerpoint/2010/main" val="1813388233"/>
+      </p:ext>
+    </p:extLst>
+  </p:cSld>
+  <p:clrMapOvr>
+    <a:masterClrMapping/>
+  </p:clrMapOvr>
+</p:sld>
+</file>
+
+<file path=ppt/slides/slide20.xml><?xml version="1.0" encoding="utf-8"?>
 <p:sld xmlns:a="http://schemas.openxmlformats.org/drawingml/2006/main" xmlns:r="http://schemas.openxmlformats.org/officeDocument/2006/relationships" xmlns:p="http://schemas.openxmlformats.org/presentationml/2006/main">
   <p:cSld>
     <p:spTree>
@@ -9123,282 +9725,6 @@
 </p:sld>
 </file>
 
-<file path=ppt/slides/slide2.xml><?xml version="1.0" encoding="utf-8"?>
-<p:sld xmlns:a="http://schemas.openxmlformats.org/drawingml/2006/main" xmlns:r="http://schemas.openxmlformats.org/officeDocument/2006/relationships" xmlns:p="http://schemas.openxmlformats.org/presentationml/2006/main">
-  <p:cSld>
-    <p:spTree>
-      <p:nvGrpSpPr>
-        <p:cNvPr id="1" name=""/>
-        <p:cNvGrpSpPr/>
-        <p:nvPr/>
-      </p:nvGrpSpPr>
-      <p:grpSpPr>
-        <a:xfrm>
-          <a:off x="0" y="0"/>
-          <a:ext cx="0" cy="0"/>
-          <a:chOff x="0" y="0"/>
-          <a:chExt cx="0" cy="0"/>
-        </a:xfrm>
-      </p:grpSpPr>
-      <p:sp>
-        <p:nvSpPr>
-          <p:cNvPr id="2" name="Title 1">
-            <a:extLst>
-              <a:ext uri="{FF2B5EF4-FFF2-40B4-BE49-F238E27FC236}">
-                <a16:creationId xmlns:a16="http://schemas.microsoft.com/office/drawing/2014/main" id="{243B8DEF-0B26-CC6F-E7E8-D964FCA830E6}"/>
-              </a:ext>
-            </a:extLst>
-          </p:cNvPr>
-          <p:cNvSpPr>
-            <a:spLocks noGrp="1"/>
-          </p:cNvSpPr>
-          <p:nvPr>
-            <p:ph type="title"/>
-          </p:nvPr>
-        </p:nvSpPr>
-        <p:spPr/>
-        <p:txBody>
-          <a:bodyPr/>
-          <a:lstStyle/>
-          <a:p>
-            <a:r>
-              <a:rPr lang="en-NZ" dirty="0">
-                <a:solidFill>
-                  <a:schemeClr val="bg1"/>
-                </a:solidFill>
-              </a:rPr>
-              <a:t>Objectives</a:t>
-            </a:r>
-          </a:p>
-        </p:txBody>
-      </p:sp>
-      <p:sp>
-        <p:nvSpPr>
-          <p:cNvPr id="3" name="Content Placeholder 2">
-            <a:extLst>
-              <a:ext uri="{FF2B5EF4-FFF2-40B4-BE49-F238E27FC236}">
-                <a16:creationId xmlns:a16="http://schemas.microsoft.com/office/drawing/2014/main" id="{D4039AF6-074E-B25E-B64F-552EFDBCBCCF}"/>
-              </a:ext>
-            </a:extLst>
-          </p:cNvPr>
-          <p:cNvSpPr>
-            <a:spLocks noGrp="1"/>
-          </p:cNvSpPr>
-          <p:nvPr>
-            <p:ph idx="1"/>
-          </p:nvPr>
-        </p:nvSpPr>
-        <p:spPr/>
-        <p:txBody>
-          <a:bodyPr/>
-          <a:lstStyle/>
-          <a:p>
-            <a:r>
-              <a:rPr lang="en-NZ" dirty="0">
-                <a:solidFill>
-                  <a:schemeClr val="bg1"/>
-                </a:solidFill>
-              </a:rPr>
-              <a:t>Demystifying data modelling</a:t>
-            </a:r>
-          </a:p>
-          <a:p>
-            <a:r>
-              <a:rPr lang="en-NZ" dirty="0">
-                <a:solidFill>
-                  <a:schemeClr val="bg1"/>
-                </a:solidFill>
-              </a:rPr>
-              <a:t>Showing that modelling is more understandable than tests</a:t>
-            </a:r>
-          </a:p>
-          <a:p>
-            <a:r>
-              <a:rPr lang="en-NZ" dirty="0">
-                <a:solidFill>
-                  <a:schemeClr val="bg1"/>
-                </a:solidFill>
-              </a:rPr>
-              <a:t>Showing that we often model without knowing it</a:t>
-            </a:r>
-          </a:p>
-          <a:p>
-            <a:r>
-              <a:rPr lang="en-NZ" dirty="0">
-                <a:solidFill>
-                  <a:schemeClr val="bg1"/>
-                </a:solidFill>
-              </a:rPr>
-              <a:t>Moving to Bayesian models</a:t>
-            </a:r>
-          </a:p>
-        </p:txBody>
-      </p:sp>
-    </p:spTree>
-    <p:extLst>
-      <p:ext uri="{BB962C8B-B14F-4D97-AF65-F5344CB8AC3E}">
-        <p14:creationId xmlns:p14="http://schemas.microsoft.com/office/powerpoint/2010/main" val="1725611298"/>
-      </p:ext>
-    </p:extLst>
-  </p:cSld>
-  <p:clrMapOvr>
-    <a:masterClrMapping/>
-  </p:clrMapOvr>
-</p:sld>
-</file>
-
-<file path=ppt/slides/slide20.xml><?xml version="1.0" encoding="utf-8"?>
-<p:sld xmlns:a="http://schemas.openxmlformats.org/drawingml/2006/main" xmlns:r="http://schemas.openxmlformats.org/officeDocument/2006/relationships" xmlns:p="http://schemas.openxmlformats.org/presentationml/2006/main">
-  <p:cSld>
-    <p:spTree>
-      <p:nvGrpSpPr>
-        <p:cNvPr id="1" name=""/>
-        <p:cNvGrpSpPr/>
-        <p:nvPr/>
-      </p:nvGrpSpPr>
-      <p:grpSpPr>
-        <a:xfrm>
-          <a:off x="0" y="0"/>
-          <a:ext cx="0" cy="0"/>
-          <a:chOff x="0" y="0"/>
-          <a:chExt cx="0" cy="0"/>
-        </a:xfrm>
-      </p:grpSpPr>
-      <p:sp>
-        <p:nvSpPr>
-          <p:cNvPr id="2" name="Title 1">
-            <a:extLst>
-              <a:ext uri="{FF2B5EF4-FFF2-40B4-BE49-F238E27FC236}">
-                <a16:creationId xmlns:a16="http://schemas.microsoft.com/office/drawing/2014/main" id="{B242B412-30A4-C33B-B4ED-FB55074C24B2}"/>
-              </a:ext>
-            </a:extLst>
-          </p:cNvPr>
-          <p:cNvSpPr>
-            <a:spLocks noGrp="1"/>
-          </p:cNvSpPr>
-          <p:nvPr>
-            <p:ph type="title"/>
-          </p:nvPr>
-        </p:nvSpPr>
-        <p:spPr/>
-        <p:txBody>
-          <a:bodyPr/>
-          <a:lstStyle/>
-          <a:p>
-            <a:r>
-              <a:rPr lang="en-NZ" dirty="0">
-                <a:solidFill>
-                  <a:schemeClr val="bg1"/>
-                </a:solidFill>
-              </a:rPr>
-              <a:t>Going Bayesian</a:t>
-            </a:r>
-          </a:p>
-        </p:txBody>
-      </p:sp>
-      <p:sp>
-        <p:nvSpPr>
-          <p:cNvPr id="3" name="Content Placeholder 2">
-            <a:extLst>
-              <a:ext uri="{FF2B5EF4-FFF2-40B4-BE49-F238E27FC236}">
-                <a16:creationId xmlns:a16="http://schemas.microsoft.com/office/drawing/2014/main" id="{5B4E1142-E08F-5C6C-6C9D-B9ADE1E6E06B}"/>
-              </a:ext>
-            </a:extLst>
-          </p:cNvPr>
-          <p:cNvSpPr>
-            <a:spLocks noGrp="1"/>
-          </p:cNvSpPr>
-          <p:nvPr>
-            <p:ph idx="1"/>
-          </p:nvPr>
-        </p:nvSpPr>
-        <p:spPr>
-          <a:xfrm>
-            <a:off x="838200" y="1825625"/>
-            <a:ext cx="10515600" cy="3587623"/>
-          </a:xfrm>
-        </p:spPr>
-        <p:txBody>
-          <a:bodyPr/>
-          <a:lstStyle/>
-          <a:p>
-            <a:r>
-              <a:rPr lang="en-NZ" dirty="0">
-                <a:solidFill>
-                  <a:schemeClr val="bg1"/>
-                </a:solidFill>
-              </a:rPr>
-              <a:t>A linear model is a more flexible tool than and ANOVA (or any other tests)</a:t>
-            </a:r>
-          </a:p>
-          <a:p>
-            <a:r>
-              <a:rPr lang="en-NZ" dirty="0">
-                <a:solidFill>
-                  <a:schemeClr val="bg1"/>
-                </a:solidFill>
-              </a:rPr>
-              <a:t>The switch between the two it’s quite easy</a:t>
-            </a:r>
-          </a:p>
-          <a:p>
-            <a:r>
-              <a:rPr lang="en-NZ" dirty="0">
-                <a:solidFill>
-                  <a:schemeClr val="bg1"/>
-                </a:solidFill>
-              </a:rPr>
-              <a:t>The switch to a Bayesian approach is quite easy too</a:t>
-            </a:r>
-          </a:p>
-          <a:p>
-            <a:pPr lvl="1"/>
-            <a:r>
-              <a:rPr lang="en-NZ" dirty="0">
-                <a:solidFill>
-                  <a:schemeClr val="bg1"/>
-                </a:solidFill>
-              </a:rPr>
-              <a:t>In terms of code</a:t>
-            </a:r>
-          </a:p>
-          <a:p>
-            <a:pPr lvl="1"/>
-            <a:r>
-              <a:rPr lang="en-NZ" dirty="0">
-                <a:solidFill>
-                  <a:schemeClr val="bg1"/>
-                </a:solidFill>
-              </a:rPr>
-              <a:t>As for anything, some aspects require learning and adjusting, BUT…</a:t>
-            </a:r>
-          </a:p>
-          <a:p>
-            <a:pPr lvl="1"/>
-            <a:r>
-              <a:rPr lang="en-NZ" dirty="0">
-                <a:solidFill>
-                  <a:schemeClr val="bg1"/>
-                </a:solidFill>
-              </a:rPr>
-              <a:t>The benefits in terms of interpretability and general practice outweigh the challenges </a:t>
-            </a:r>
-          </a:p>
-        </p:txBody>
-      </p:sp>
-    </p:spTree>
-    <p:extLst>
-      <p:ext uri="{BB962C8B-B14F-4D97-AF65-F5344CB8AC3E}">
-        <p14:creationId xmlns:p14="http://schemas.microsoft.com/office/powerpoint/2010/main" val="42269332"/>
-      </p:ext>
-    </p:extLst>
-  </p:cSld>
-  <p:clrMapOvr>
-    <a:masterClrMapping/>
-  </p:clrMapOvr>
-</p:sld>
-</file>
-
 <file path=ppt/slides/slide21.xml><?xml version="1.0" encoding="utf-8"?>
 <p:sld xmlns:a="http://schemas.openxmlformats.org/drawingml/2006/main" xmlns:r="http://schemas.openxmlformats.org/officeDocument/2006/relationships" xmlns:p="http://schemas.openxmlformats.org/presentationml/2006/main">
   <p:cSld>
@@ -9421,6 +9747,158 @@
           <p:cNvPr id="2" name="Title 1">
             <a:extLst>
               <a:ext uri="{FF2B5EF4-FFF2-40B4-BE49-F238E27FC236}">
+                <a16:creationId xmlns:a16="http://schemas.microsoft.com/office/drawing/2014/main" id="{B242B412-30A4-C33B-B4ED-FB55074C24B2}"/>
+              </a:ext>
+            </a:extLst>
+          </p:cNvPr>
+          <p:cNvSpPr>
+            <a:spLocks noGrp="1"/>
+          </p:cNvSpPr>
+          <p:nvPr>
+            <p:ph type="title"/>
+          </p:nvPr>
+        </p:nvSpPr>
+        <p:spPr/>
+        <p:txBody>
+          <a:bodyPr/>
+          <a:lstStyle/>
+          <a:p>
+            <a:r>
+              <a:rPr lang="en-NZ" dirty="0">
+                <a:solidFill>
+                  <a:schemeClr val="bg1"/>
+                </a:solidFill>
+              </a:rPr>
+              <a:t>Going Bayesian</a:t>
+            </a:r>
+          </a:p>
+        </p:txBody>
+      </p:sp>
+      <p:sp>
+        <p:nvSpPr>
+          <p:cNvPr id="3" name="Content Placeholder 2">
+            <a:extLst>
+              <a:ext uri="{FF2B5EF4-FFF2-40B4-BE49-F238E27FC236}">
+                <a16:creationId xmlns:a16="http://schemas.microsoft.com/office/drawing/2014/main" id="{5B4E1142-E08F-5C6C-6C9D-B9ADE1E6E06B}"/>
+              </a:ext>
+            </a:extLst>
+          </p:cNvPr>
+          <p:cNvSpPr>
+            <a:spLocks noGrp="1"/>
+          </p:cNvSpPr>
+          <p:nvPr>
+            <p:ph idx="1"/>
+          </p:nvPr>
+        </p:nvSpPr>
+        <p:spPr>
+          <a:xfrm>
+            <a:off x="838200" y="1825625"/>
+            <a:ext cx="10515600" cy="3587623"/>
+          </a:xfrm>
+        </p:spPr>
+        <p:txBody>
+          <a:bodyPr/>
+          <a:lstStyle/>
+          <a:p>
+            <a:r>
+              <a:rPr lang="en-NZ" dirty="0">
+                <a:solidFill>
+                  <a:schemeClr val="bg1"/>
+                </a:solidFill>
+              </a:rPr>
+              <a:t>A linear model is a more flexible tool than and ANOVA (or any other tests)</a:t>
+            </a:r>
+          </a:p>
+          <a:p>
+            <a:r>
+              <a:rPr lang="en-NZ" dirty="0">
+                <a:solidFill>
+                  <a:schemeClr val="bg1"/>
+                </a:solidFill>
+              </a:rPr>
+              <a:t>The switch between the two it’s quite easy</a:t>
+            </a:r>
+          </a:p>
+          <a:p>
+            <a:r>
+              <a:rPr lang="en-NZ" dirty="0">
+                <a:solidFill>
+                  <a:schemeClr val="bg1"/>
+                </a:solidFill>
+              </a:rPr>
+              <a:t>The switch to a Bayesian approach is quite easy too</a:t>
+            </a:r>
+          </a:p>
+          <a:p>
+            <a:pPr lvl="1"/>
+            <a:r>
+              <a:rPr lang="en-NZ" dirty="0">
+                <a:solidFill>
+                  <a:schemeClr val="bg1"/>
+                </a:solidFill>
+              </a:rPr>
+              <a:t>In terms of code</a:t>
+            </a:r>
+          </a:p>
+          <a:p>
+            <a:pPr lvl="1"/>
+            <a:r>
+              <a:rPr lang="en-NZ" dirty="0">
+                <a:solidFill>
+                  <a:schemeClr val="bg1"/>
+                </a:solidFill>
+              </a:rPr>
+              <a:t>As for anything, some aspects require learning and adjusting, BUT…</a:t>
+            </a:r>
+          </a:p>
+          <a:p>
+            <a:pPr lvl="1"/>
+            <a:r>
+              <a:rPr lang="en-NZ" dirty="0">
+                <a:solidFill>
+                  <a:schemeClr val="bg1"/>
+                </a:solidFill>
+              </a:rPr>
+              <a:t>The benefits in terms of interpretability and general practice outweigh the challenges </a:t>
+            </a:r>
+          </a:p>
+        </p:txBody>
+      </p:sp>
+    </p:spTree>
+    <p:extLst>
+      <p:ext uri="{BB962C8B-B14F-4D97-AF65-F5344CB8AC3E}">
+        <p14:creationId xmlns:p14="http://schemas.microsoft.com/office/powerpoint/2010/main" val="42269332"/>
+      </p:ext>
+    </p:extLst>
+  </p:cSld>
+  <p:clrMapOvr>
+    <a:masterClrMapping/>
+  </p:clrMapOvr>
+</p:sld>
+</file>
+
+<file path=ppt/slides/slide22.xml><?xml version="1.0" encoding="utf-8"?>
+<p:sld xmlns:a="http://schemas.openxmlformats.org/drawingml/2006/main" xmlns:r="http://schemas.openxmlformats.org/officeDocument/2006/relationships" xmlns:p="http://schemas.openxmlformats.org/presentationml/2006/main">
+  <p:cSld>
+    <p:spTree>
+      <p:nvGrpSpPr>
+        <p:cNvPr id="1" name=""/>
+        <p:cNvGrpSpPr/>
+        <p:nvPr/>
+      </p:nvGrpSpPr>
+      <p:grpSpPr>
+        <a:xfrm>
+          <a:off x="0" y="0"/>
+          <a:ext cx="0" cy="0"/>
+          <a:chOff x="0" y="0"/>
+          <a:chExt cx="0" cy="0"/>
+        </a:xfrm>
+      </p:grpSpPr>
+      <p:sp>
+        <p:nvSpPr>
+          <p:cNvPr id="2" name="Title 1">
+            <a:extLst>
+              <a:ext uri="{FF2B5EF4-FFF2-40B4-BE49-F238E27FC236}">
                 <a16:creationId xmlns:a16="http://schemas.microsoft.com/office/drawing/2014/main" id="{4CCD5B2F-6951-210D-5E0B-DB23AB747A24}"/>
               </a:ext>
             </a:extLst>
@@ -9505,7 +9983,7 @@
 </p:sld>
 </file>
 
-<file path=ppt/slides/slide22.xml><?xml version="1.0" encoding="utf-8"?>
+<file path=ppt/slides/slide23.xml><?xml version="1.0" encoding="utf-8"?>
 <p:sld xmlns:a="http://schemas.openxmlformats.org/drawingml/2006/main" xmlns:r="http://schemas.openxmlformats.org/officeDocument/2006/relationships" xmlns:p="http://schemas.openxmlformats.org/presentationml/2006/main">
   <p:cSld>
     <p:spTree>
@@ -9630,7 +10108,7 @@
           <p:cNvPr id="2" name="Title 1">
             <a:extLst>
               <a:ext uri="{FF2B5EF4-FFF2-40B4-BE49-F238E27FC236}">
-                <a16:creationId xmlns:a16="http://schemas.microsoft.com/office/drawing/2014/main" id="{A7A12ED3-4A2E-7E75-2428-2ED3EB5C8E8C}"/>
+                <a16:creationId xmlns:a16="http://schemas.microsoft.com/office/drawing/2014/main" id="{243B8DEF-0B26-CC6F-E7E8-D964FCA830E6}"/>
               </a:ext>
             </a:extLst>
           </p:cNvPr>
@@ -9652,7 +10130,7 @@
                   <a:schemeClr val="bg1"/>
                 </a:solidFill>
               </a:rPr>
-              <a:t>Approach</a:t>
+              <a:t>Objectives</a:t>
             </a:r>
           </a:p>
         </p:txBody>
@@ -9662,7 +10140,7 @@
           <p:cNvPr id="3" name="Content Placeholder 2">
             <a:extLst>
               <a:ext uri="{FF2B5EF4-FFF2-40B4-BE49-F238E27FC236}">
-                <a16:creationId xmlns:a16="http://schemas.microsoft.com/office/drawing/2014/main" id="{0D8E45E9-ECDE-C6B4-A514-5228B3229F65}"/>
+                <a16:creationId xmlns:a16="http://schemas.microsoft.com/office/drawing/2014/main" id="{D4039AF6-074E-B25E-B64F-552EFDBCBCCF}"/>
               </a:ext>
             </a:extLst>
           </p:cNvPr>
@@ -9673,12 +10151,7 @@
             <p:ph idx="1"/>
           </p:nvPr>
         </p:nvSpPr>
-        <p:spPr>
-          <a:xfrm>
-            <a:off x="838200" y="1825625"/>
-            <a:ext cx="10515600" cy="1767967"/>
-          </a:xfrm>
-        </p:spPr>
+        <p:spPr/>
         <p:txBody>
           <a:bodyPr/>
           <a:lstStyle/>
@@ -9689,7 +10162,7 @@
                   <a:schemeClr val="bg1"/>
                 </a:solidFill>
               </a:rPr>
-              <a:t>Unpacking a simple ANOVA</a:t>
+              <a:t>Demystifying data modelling</a:t>
             </a:r>
           </a:p>
           <a:p>
@@ -9699,7 +10172,7 @@
                   <a:schemeClr val="bg1"/>
                 </a:solidFill>
               </a:rPr>
-              <a:t>Showing that ANOVA is a linear model* in disguise</a:t>
+              <a:t>Showing that modelling is more understandable than tests</a:t>
             </a:r>
           </a:p>
           <a:p>
@@ -9709,38 +10182,9 @@
                   <a:schemeClr val="bg1"/>
                 </a:solidFill>
               </a:rPr>
-              <a:t>Running a first Bayesian model</a:t>
-            </a:r>
-          </a:p>
-        </p:txBody>
-      </p:sp>
-      <p:sp>
-        <p:nvSpPr>
-          <p:cNvPr id="4" name="TextBox 3">
-            <a:extLst>
-              <a:ext uri="{FF2B5EF4-FFF2-40B4-BE49-F238E27FC236}">
-                <a16:creationId xmlns:a16="http://schemas.microsoft.com/office/drawing/2014/main" id="{3C22869D-ADB2-6BDD-068A-1082FFBB6BDA}"/>
-              </a:ext>
-            </a:extLst>
-          </p:cNvPr>
-          <p:cNvSpPr txBox="1"/>
-          <p:nvPr/>
-        </p:nvSpPr>
-        <p:spPr>
-          <a:xfrm>
-            <a:off x="838200" y="6308209"/>
-            <a:ext cx="5257800" cy="369332"/>
-          </a:xfrm>
-          <a:prstGeom prst="rect">
-            <a:avLst/>
-          </a:prstGeom>
-          <a:noFill/>
-        </p:spPr>
-        <p:txBody>
-          <a:bodyPr wrap="square" rtlCol="0">
-            <a:spAutoFit/>
-          </a:bodyPr>
-          <a:lstStyle/>
+              <a:t>Showing that we often model without knowing it</a:t>
+            </a:r>
+          </a:p>
           <a:p>
             <a:r>
               <a:rPr lang="en-NZ" dirty="0">
@@ -9748,7 +10192,7 @@
                   <a:schemeClr val="bg1"/>
                 </a:solidFill>
               </a:rPr>
-              <a:t>* Technically is a method applied to a linear model</a:t>
+              <a:t>Moving to Bayesian models</a:t>
             </a:r>
           </a:p>
         </p:txBody>
@@ -9756,7 +10200,7 @@
     </p:spTree>
     <p:extLst>
       <p:ext uri="{BB962C8B-B14F-4D97-AF65-F5344CB8AC3E}">
-        <p14:creationId xmlns:p14="http://schemas.microsoft.com/office/powerpoint/2010/main" val="1557565991"/>
+        <p14:creationId xmlns:p14="http://schemas.microsoft.com/office/powerpoint/2010/main" val="1725611298"/>
       </p:ext>
     </p:extLst>
   </p:cSld>
@@ -9783,6 +10227,164 @@
           <a:chExt cx="0" cy="0"/>
         </a:xfrm>
       </p:grpSpPr>
+      <p:sp>
+        <p:nvSpPr>
+          <p:cNvPr id="2" name="Title 1">
+            <a:extLst>
+              <a:ext uri="{FF2B5EF4-FFF2-40B4-BE49-F238E27FC236}">
+                <a16:creationId xmlns:a16="http://schemas.microsoft.com/office/drawing/2014/main" id="{A7A12ED3-4A2E-7E75-2428-2ED3EB5C8E8C}"/>
+              </a:ext>
+            </a:extLst>
+          </p:cNvPr>
+          <p:cNvSpPr>
+            <a:spLocks noGrp="1"/>
+          </p:cNvSpPr>
+          <p:nvPr>
+            <p:ph type="title"/>
+          </p:nvPr>
+        </p:nvSpPr>
+        <p:spPr/>
+        <p:txBody>
+          <a:bodyPr/>
+          <a:lstStyle/>
+          <a:p>
+            <a:r>
+              <a:rPr lang="en-NZ" dirty="0">
+                <a:solidFill>
+                  <a:schemeClr val="bg1"/>
+                </a:solidFill>
+              </a:rPr>
+              <a:t>Approach</a:t>
+            </a:r>
+          </a:p>
+        </p:txBody>
+      </p:sp>
+      <p:sp>
+        <p:nvSpPr>
+          <p:cNvPr id="3" name="Content Placeholder 2">
+            <a:extLst>
+              <a:ext uri="{FF2B5EF4-FFF2-40B4-BE49-F238E27FC236}">
+                <a16:creationId xmlns:a16="http://schemas.microsoft.com/office/drawing/2014/main" id="{0D8E45E9-ECDE-C6B4-A514-5228B3229F65}"/>
+              </a:ext>
+            </a:extLst>
+          </p:cNvPr>
+          <p:cNvSpPr>
+            <a:spLocks noGrp="1"/>
+          </p:cNvSpPr>
+          <p:nvPr>
+            <p:ph idx="1"/>
+          </p:nvPr>
+        </p:nvSpPr>
+        <p:spPr>
+          <a:xfrm>
+            <a:off x="838200" y="1825625"/>
+            <a:ext cx="10515600" cy="1767967"/>
+          </a:xfrm>
+        </p:spPr>
+        <p:txBody>
+          <a:bodyPr/>
+          <a:lstStyle/>
+          <a:p>
+            <a:r>
+              <a:rPr lang="en-NZ" dirty="0">
+                <a:solidFill>
+                  <a:schemeClr val="bg1"/>
+                </a:solidFill>
+              </a:rPr>
+              <a:t>Unpacking a simple ANOVA</a:t>
+            </a:r>
+          </a:p>
+          <a:p>
+            <a:r>
+              <a:rPr lang="en-NZ" dirty="0">
+                <a:solidFill>
+                  <a:schemeClr val="bg1"/>
+                </a:solidFill>
+              </a:rPr>
+              <a:t>Showing that ANOVA is a linear model* in disguise</a:t>
+            </a:r>
+          </a:p>
+          <a:p>
+            <a:r>
+              <a:rPr lang="en-NZ" dirty="0">
+                <a:solidFill>
+                  <a:schemeClr val="bg1"/>
+                </a:solidFill>
+              </a:rPr>
+              <a:t>Running a first Bayesian model</a:t>
+            </a:r>
+          </a:p>
+        </p:txBody>
+      </p:sp>
+      <p:sp>
+        <p:nvSpPr>
+          <p:cNvPr id="4" name="TextBox 3">
+            <a:extLst>
+              <a:ext uri="{FF2B5EF4-FFF2-40B4-BE49-F238E27FC236}">
+                <a16:creationId xmlns:a16="http://schemas.microsoft.com/office/drawing/2014/main" id="{3C22869D-ADB2-6BDD-068A-1082FFBB6BDA}"/>
+              </a:ext>
+            </a:extLst>
+          </p:cNvPr>
+          <p:cNvSpPr txBox="1"/>
+          <p:nvPr/>
+        </p:nvSpPr>
+        <p:spPr>
+          <a:xfrm>
+            <a:off x="838200" y="6308209"/>
+            <a:ext cx="5257800" cy="369332"/>
+          </a:xfrm>
+          <a:prstGeom prst="rect">
+            <a:avLst/>
+          </a:prstGeom>
+          <a:noFill/>
+        </p:spPr>
+        <p:txBody>
+          <a:bodyPr wrap="square" rtlCol="0">
+            <a:spAutoFit/>
+          </a:bodyPr>
+          <a:lstStyle/>
+          <a:p>
+            <a:r>
+              <a:rPr lang="en-NZ" dirty="0">
+                <a:solidFill>
+                  <a:schemeClr val="bg1"/>
+                </a:solidFill>
+              </a:rPr>
+              <a:t>* Technically is a method applied to a linear model</a:t>
+            </a:r>
+          </a:p>
+        </p:txBody>
+      </p:sp>
+    </p:spTree>
+    <p:extLst>
+      <p:ext uri="{BB962C8B-B14F-4D97-AF65-F5344CB8AC3E}">
+        <p14:creationId xmlns:p14="http://schemas.microsoft.com/office/powerpoint/2010/main" val="1557565991"/>
+      </p:ext>
+    </p:extLst>
+  </p:cSld>
+  <p:clrMapOvr>
+    <a:masterClrMapping/>
+  </p:clrMapOvr>
+</p:sld>
+</file>
+
+<file path=ppt/slides/slide5.xml><?xml version="1.0" encoding="utf-8"?>
+<p:sld xmlns:a="http://schemas.openxmlformats.org/drawingml/2006/main" xmlns:r="http://schemas.openxmlformats.org/officeDocument/2006/relationships" xmlns:p="http://schemas.openxmlformats.org/presentationml/2006/main">
+  <p:cSld>
+    <p:spTree>
+      <p:nvGrpSpPr>
+        <p:cNvPr id="1" name=""/>
+        <p:cNvGrpSpPr/>
+        <p:nvPr/>
+      </p:nvGrpSpPr>
+      <p:grpSpPr>
+        <a:xfrm>
+          <a:off x="0" y="0"/>
+          <a:ext cx="0" cy="0"/>
+          <a:chOff x="0" y="0"/>
+          <a:chExt cx="0" cy="0"/>
+        </a:xfrm>
+      </p:grpSpPr>
       <p:pic>
         <p:nvPicPr>
           <p:cNvPr id="7" name="Graphic 6">
@@ -9870,7 +10472,7 @@
 </p:sld>
 </file>
 
-<file path=ppt/slides/slide5.xml><?xml version="1.0" encoding="utf-8"?>
+<file path=ppt/slides/slide6.xml><?xml version="1.0" encoding="utf-8"?>
 <p:sld xmlns:a="http://schemas.openxmlformats.org/drawingml/2006/main" xmlns:r="http://schemas.openxmlformats.org/officeDocument/2006/relationships" xmlns:p="http://schemas.openxmlformats.org/presentationml/2006/main">
   <p:cSld>
     <p:spTree>
@@ -10289,7 +10891,7 @@
 </p:sld>
 </file>
 
-<file path=ppt/slides/slide6.xml><?xml version="1.0" encoding="utf-8"?>
+<file path=ppt/slides/slide7.xml><?xml version="1.0" encoding="utf-8"?>
 <p:sld xmlns:a="http://schemas.openxmlformats.org/drawingml/2006/main" xmlns:r="http://schemas.openxmlformats.org/officeDocument/2006/relationships" xmlns:p="http://schemas.openxmlformats.org/presentationml/2006/main">
   <p:cSld>
     <p:spTree>
@@ -10809,7 +11411,7 @@
 </p:sld>
 </file>
 
-<file path=ppt/slides/slide7.xml><?xml version="1.0" encoding="utf-8"?>
+<file path=ppt/slides/slide8.xml><?xml version="1.0" encoding="utf-8"?>
 <p:sld xmlns:a="http://schemas.openxmlformats.org/drawingml/2006/main" xmlns:r="http://schemas.openxmlformats.org/officeDocument/2006/relationships" xmlns:p="http://schemas.openxmlformats.org/presentationml/2006/main">
   <p:cSld>
     <p:spTree>
@@ -11003,7 +11605,7 @@
 </p:sld>
 </file>
 
-<file path=ppt/slides/slide8.xml><?xml version="1.0" encoding="utf-8"?>
+<file path=ppt/slides/slide9.xml><?xml version="1.0" encoding="utf-8"?>
 <p:sld xmlns:a="http://schemas.openxmlformats.org/drawingml/2006/main" xmlns:r="http://schemas.openxmlformats.org/officeDocument/2006/relationships" xmlns:p="http://schemas.openxmlformats.org/presentationml/2006/main">
   <p:cSld>
     <p:spTree>
@@ -11099,376 +11701,6 @@
     <p:extLst>
       <p:ext uri="{BB962C8B-B14F-4D97-AF65-F5344CB8AC3E}">
         <p14:creationId xmlns:p14="http://schemas.microsoft.com/office/powerpoint/2010/main" val="3019620244"/>
-      </p:ext>
-    </p:extLst>
-  </p:cSld>
-  <p:clrMapOvr>
-    <a:masterClrMapping/>
-  </p:clrMapOvr>
-</p:sld>
-</file>
-
-<file path=ppt/slides/slide9.xml><?xml version="1.0" encoding="utf-8"?>
-<p:sld xmlns:a="http://schemas.openxmlformats.org/drawingml/2006/main" xmlns:r="http://schemas.openxmlformats.org/officeDocument/2006/relationships" xmlns:p="http://schemas.openxmlformats.org/presentationml/2006/main">
-  <p:cSld>
-    <p:spTree>
-      <p:nvGrpSpPr>
-        <p:cNvPr id="1" name="">
-          <a:extLst>
-            <a:ext uri="{FF2B5EF4-FFF2-40B4-BE49-F238E27FC236}">
-              <a16:creationId xmlns:a16="http://schemas.microsoft.com/office/drawing/2014/main" id="{393621E9-6DF9-DACC-F97E-AF4379D1F12F}"/>
-            </a:ext>
-          </a:extLst>
-        </p:cNvPr>
-        <p:cNvGrpSpPr/>
-        <p:nvPr/>
-      </p:nvGrpSpPr>
-      <p:grpSpPr>
-        <a:xfrm>
-          <a:off x="0" y="0"/>
-          <a:ext cx="0" cy="0"/>
-          <a:chOff x="0" y="0"/>
-          <a:chExt cx="0" cy="0"/>
-        </a:xfrm>
-      </p:grpSpPr>
-      <p:sp>
-        <p:nvSpPr>
-          <p:cNvPr id="2" name="Title 1">
-            <a:extLst>
-              <a:ext uri="{FF2B5EF4-FFF2-40B4-BE49-F238E27FC236}">
-                <a16:creationId xmlns:a16="http://schemas.microsoft.com/office/drawing/2014/main" id="{736A8B86-9439-166D-BACE-1A398662A157}"/>
-              </a:ext>
-            </a:extLst>
-          </p:cNvPr>
-          <p:cNvSpPr>
-            <a:spLocks noGrp="1"/>
-          </p:cNvSpPr>
-          <p:nvPr>
-            <p:ph type="title"/>
-          </p:nvPr>
-        </p:nvSpPr>
-        <p:spPr/>
-        <p:txBody>
-          <a:bodyPr/>
-          <a:lstStyle/>
-          <a:p>
-            <a:r>
-              <a:rPr lang="en-NZ" dirty="0">
-                <a:solidFill>
-                  <a:schemeClr val="bg1"/>
-                </a:solidFill>
-              </a:rPr>
-              <a:t>Why Variance</a:t>
-            </a:r>
-          </a:p>
-        </p:txBody>
-      </p:sp>
-      <p:sp>
-        <p:nvSpPr>
-          <p:cNvPr id="5" name="Content Placeholder 4">
-            <a:extLst>
-              <a:ext uri="{FF2B5EF4-FFF2-40B4-BE49-F238E27FC236}">
-                <a16:creationId xmlns:a16="http://schemas.microsoft.com/office/drawing/2014/main" id="{5ECC9EB3-2713-F476-71D8-6CAC591B3FB4}"/>
-              </a:ext>
-            </a:extLst>
-          </p:cNvPr>
-          <p:cNvSpPr>
-            <a:spLocks noGrp="1"/>
-          </p:cNvSpPr>
-          <p:nvPr>
-            <p:ph idx="1"/>
-          </p:nvPr>
-        </p:nvSpPr>
-        <p:spPr>
-          <a:xfrm>
-            <a:off x="838200" y="1320800"/>
-            <a:ext cx="10515600" cy="624967"/>
-          </a:xfrm>
-        </p:spPr>
-        <p:txBody>
-          <a:bodyPr/>
-          <a:lstStyle/>
-          <a:p>
-            <a:r>
-              <a:rPr lang="en-NZ" dirty="0">
-                <a:solidFill>
-                  <a:schemeClr val="bg1"/>
-                </a:solidFill>
-              </a:rPr>
-              <a:t>Why do we use analysis of variance to test a difference in means?</a:t>
-            </a:r>
-          </a:p>
-        </p:txBody>
-      </p:sp>
-      <p:grpSp>
-        <p:nvGrpSpPr>
-          <p:cNvPr id="12" name="Group 11">
-            <a:extLst>
-              <a:ext uri="{FF2B5EF4-FFF2-40B4-BE49-F238E27FC236}">
-                <a16:creationId xmlns:a16="http://schemas.microsoft.com/office/drawing/2014/main" id="{ACC654DF-98CF-34CB-EA79-2E27D5707229}"/>
-              </a:ext>
-            </a:extLst>
-          </p:cNvPr>
-          <p:cNvGrpSpPr/>
-          <p:nvPr/>
-        </p:nvGrpSpPr>
-        <p:grpSpPr>
-          <a:xfrm>
-            <a:off x="1282001" y="1945767"/>
-            <a:ext cx="4635373" cy="4848004"/>
-            <a:chOff x="3778313" y="1945767"/>
-            <a:chExt cx="4635373" cy="4848004"/>
-          </a:xfrm>
-        </p:grpSpPr>
-        <p:pic>
-          <p:nvPicPr>
-            <p:cNvPr id="4" name="Graphic 3">
-              <a:extLst>
-                <a:ext uri="{FF2B5EF4-FFF2-40B4-BE49-F238E27FC236}">
-                  <a16:creationId xmlns:a16="http://schemas.microsoft.com/office/drawing/2014/main" id="{692AEC61-D23D-98B8-811B-0832EF86EE04}"/>
-                </a:ext>
-              </a:extLst>
-            </p:cNvPr>
-            <p:cNvPicPr>
-              <a:picLocks noChangeAspect="1"/>
-            </p:cNvPicPr>
-            <p:nvPr/>
-          </p:nvPicPr>
-          <p:blipFill>
-            <a:blip r:embed="rId2">
-              <a:extLst>
-                <a:ext uri="{96DAC541-7B7A-43D3-8B79-37D633B846F1}">
-                  <asvg:svgBlip xmlns:asvg="http://schemas.microsoft.com/office/drawing/2016/SVG/main" r:embed="rId3"/>
-                </a:ext>
-              </a:extLst>
-            </a:blip>
-            <a:stretch>
-              <a:fillRect/>
-            </a:stretch>
-          </p:blipFill>
-          <p:spPr>
-            <a:xfrm>
-              <a:off x="3778313" y="1945767"/>
-              <a:ext cx="4635373" cy="4848004"/>
-            </a:xfrm>
-            <a:prstGeom prst="rect">
-              <a:avLst/>
-            </a:prstGeom>
-          </p:spPr>
-        </p:pic>
-        <p:cxnSp>
-          <p:nvCxnSpPr>
-            <p:cNvPr id="6" name="Straight Arrow Connector 5">
-              <a:extLst>
-                <a:ext uri="{FF2B5EF4-FFF2-40B4-BE49-F238E27FC236}">
-                  <a16:creationId xmlns:a16="http://schemas.microsoft.com/office/drawing/2014/main" id="{87A999BF-D377-4EE1-2654-D350F3578FD5}"/>
-                </a:ext>
-              </a:extLst>
-            </p:cNvPr>
-            <p:cNvCxnSpPr/>
-            <p:nvPr/>
-          </p:nvCxnSpPr>
-          <p:spPr>
-            <a:xfrm>
-              <a:off x="5219700" y="4448175"/>
-              <a:ext cx="685800" cy="0"/>
-            </a:xfrm>
-            <a:prstGeom prst="straightConnector1">
-              <a:avLst/>
-            </a:prstGeom>
-            <a:ln w="38100">
-              <a:solidFill>
-                <a:schemeClr val="accent4">
-                  <a:lumMod val="75000"/>
-                </a:schemeClr>
-              </a:solidFill>
-              <a:headEnd type="triangle"/>
-              <a:tailEnd type="triangle"/>
-            </a:ln>
-          </p:spPr>
-          <p:style>
-            <a:lnRef idx="2">
-              <a:schemeClr val="accent1"/>
-            </a:lnRef>
-            <a:fillRef idx="0">
-              <a:schemeClr val="accent1"/>
-            </a:fillRef>
-            <a:effectRef idx="1">
-              <a:schemeClr val="accent1"/>
-            </a:effectRef>
-            <a:fontRef idx="minor">
-              <a:schemeClr val="tx1"/>
-            </a:fontRef>
-          </p:style>
-        </p:cxnSp>
-        <p:cxnSp>
-          <p:nvCxnSpPr>
-            <p:cNvPr id="7" name="Straight Arrow Connector 6">
-              <a:extLst>
-                <a:ext uri="{FF2B5EF4-FFF2-40B4-BE49-F238E27FC236}">
-                  <a16:creationId xmlns:a16="http://schemas.microsoft.com/office/drawing/2014/main" id="{D78FE40F-181C-6C02-0FA8-DF933F103BB6}"/>
-                </a:ext>
-              </a:extLst>
-            </p:cNvPr>
-            <p:cNvCxnSpPr/>
-            <p:nvPr/>
-          </p:nvCxnSpPr>
-          <p:spPr>
-            <a:xfrm>
-              <a:off x="6496812" y="4448175"/>
-              <a:ext cx="685800" cy="0"/>
-            </a:xfrm>
-            <a:prstGeom prst="straightConnector1">
-              <a:avLst/>
-            </a:prstGeom>
-            <a:ln w="38100">
-              <a:solidFill>
-                <a:srgbClr val="0070C0"/>
-              </a:solidFill>
-              <a:headEnd type="triangle"/>
-              <a:tailEnd type="triangle"/>
-            </a:ln>
-          </p:spPr>
-          <p:style>
-            <a:lnRef idx="2">
-              <a:schemeClr val="accent1"/>
-            </a:lnRef>
-            <a:fillRef idx="0">
-              <a:schemeClr val="accent1"/>
-            </a:fillRef>
-            <a:effectRef idx="1">
-              <a:schemeClr val="accent1"/>
-            </a:effectRef>
-            <a:fontRef idx="minor">
-              <a:schemeClr val="tx1"/>
-            </a:fontRef>
-          </p:style>
-        </p:cxnSp>
-        <p:cxnSp>
-          <p:nvCxnSpPr>
-            <p:cNvPr id="8" name="Straight Arrow Connector 7">
-              <a:extLst>
-                <a:ext uri="{FF2B5EF4-FFF2-40B4-BE49-F238E27FC236}">
-                  <a16:creationId xmlns:a16="http://schemas.microsoft.com/office/drawing/2014/main" id="{2BEE77A4-3597-7562-266C-2DDB4A6BF93D}"/>
-                </a:ext>
-              </a:extLst>
-            </p:cNvPr>
-            <p:cNvCxnSpPr>
-              <a:cxnSpLocks/>
-            </p:cNvCxnSpPr>
-            <p:nvPr/>
-          </p:nvCxnSpPr>
-          <p:spPr>
-            <a:xfrm>
-              <a:off x="5562600" y="2159127"/>
-              <a:ext cx="1277112" cy="0"/>
-            </a:xfrm>
-            <a:prstGeom prst="straightConnector1">
-              <a:avLst/>
-            </a:prstGeom>
-            <a:ln w="38100">
-              <a:solidFill>
-                <a:schemeClr val="accent2">
-                  <a:lumMod val="75000"/>
-                </a:schemeClr>
-              </a:solidFill>
-              <a:headEnd type="triangle"/>
-              <a:tailEnd type="triangle"/>
-            </a:ln>
-          </p:spPr>
-          <p:style>
-            <a:lnRef idx="2">
-              <a:schemeClr val="accent1"/>
-            </a:lnRef>
-            <a:fillRef idx="0">
-              <a:schemeClr val="accent1"/>
-            </a:fillRef>
-            <a:effectRef idx="1">
-              <a:schemeClr val="accent1"/>
-            </a:effectRef>
-            <a:fontRef idx="minor">
-              <a:schemeClr val="tx1"/>
-            </a:fontRef>
-          </p:style>
-        </p:cxnSp>
-      </p:grpSp>
-      <p:sp>
-        <p:nvSpPr>
-          <p:cNvPr id="11" name="TextBox 10">
-            <a:extLst>
-              <a:ext uri="{FF2B5EF4-FFF2-40B4-BE49-F238E27FC236}">
-                <a16:creationId xmlns:a16="http://schemas.microsoft.com/office/drawing/2014/main" id="{42FD80DD-1212-D670-2F62-0D87C16BE73E}"/>
-              </a:ext>
-            </a:extLst>
-          </p:cNvPr>
-          <p:cNvSpPr txBox="1"/>
-          <p:nvPr/>
-        </p:nvSpPr>
-        <p:spPr>
-          <a:xfrm>
-            <a:off x="6274627" y="1945767"/>
-            <a:ext cx="5522973" cy="923330"/>
-          </a:xfrm>
-          <a:prstGeom prst="rect">
-            <a:avLst/>
-          </a:prstGeom>
-          <a:noFill/>
-        </p:spPr>
-        <p:txBody>
-          <a:bodyPr wrap="square" rtlCol="0">
-            <a:spAutoFit/>
-          </a:bodyPr>
-          <a:lstStyle/>
-          <a:p>
-            <a:r>
-              <a:rPr lang="en-NZ" dirty="0">
-                <a:solidFill>
-                  <a:schemeClr val="bg1"/>
-                </a:solidFill>
-              </a:rPr>
-              <a:t>If </a:t>
-            </a:r>
-            <a:r>
-              <a:rPr lang="en-NZ" dirty="0">
-                <a:solidFill>
-                  <a:schemeClr val="accent2">
-                    <a:lumMod val="75000"/>
-                  </a:schemeClr>
-                </a:solidFill>
-              </a:rPr>
-              <a:t>variance between groups </a:t>
-            </a:r>
-            <a:r>
-              <a:rPr lang="en-NZ" dirty="0">
-                <a:solidFill>
-                  <a:schemeClr val="bg1"/>
-                </a:solidFill>
-              </a:rPr>
-              <a:t>is higher than </a:t>
-            </a:r>
-            <a:r>
-              <a:rPr lang="en-NZ" dirty="0">
-                <a:solidFill>
-                  <a:srgbClr val="0070C0"/>
-                </a:solidFill>
-              </a:rPr>
-              <a:t>variance within groups</a:t>
-            </a:r>
-            <a:r>
-              <a:rPr lang="en-NZ" dirty="0">
-                <a:solidFill>
-                  <a:schemeClr val="bg1"/>
-                </a:solidFill>
-              </a:rPr>
-              <a:t>, then the observations are likely drawn from two different distributions</a:t>
-            </a:r>
-          </a:p>
-        </p:txBody>
-      </p:sp>
-    </p:spTree>
-    <p:extLst>
-      <p:ext uri="{BB962C8B-B14F-4D97-AF65-F5344CB8AC3E}">
-        <p14:creationId xmlns:p14="http://schemas.microsoft.com/office/powerpoint/2010/main" val="568599909"/>
       </p:ext>
     </p:extLst>
   </p:cSld>

--- a/dev/slides/01-from_tests_to_models.pptx
+++ b/dev/slides/01-from_tests_to_models.pptx
@@ -9073,6 +9073,45 @@
           </p:txBody>
         </p:sp>
       </p:grpSp>
+      <p:sp>
+        <p:nvSpPr>
+          <p:cNvPr id="2" name="TextBox 1">
+            <a:extLst>
+              <a:ext uri="{FF2B5EF4-FFF2-40B4-BE49-F238E27FC236}">
+                <a16:creationId xmlns:a16="http://schemas.microsoft.com/office/drawing/2014/main" id="{1CB39447-D817-0B41-417D-134A7D057B45}"/>
+              </a:ext>
+            </a:extLst>
+          </p:cNvPr>
+          <p:cNvSpPr txBox="1"/>
+          <p:nvPr/>
+        </p:nvSpPr>
+        <p:spPr>
+          <a:xfrm>
+            <a:off x="9369552" y="6073169"/>
+            <a:ext cx="2084832" cy="369332"/>
+          </a:xfrm>
+          <a:prstGeom prst="rect">
+            <a:avLst/>
+          </a:prstGeom>
+          <a:noFill/>
+        </p:spPr>
+        <p:txBody>
+          <a:bodyPr wrap="square" rtlCol="0">
+            <a:spAutoFit/>
+          </a:bodyPr>
+          <a:lstStyle/>
+          <a:p>
+            <a:r>
+              <a:rPr lang="en-NZ" dirty="0">
+                <a:solidFill>
+                  <a:schemeClr val="bg1"/>
+                </a:solidFill>
+              </a:rPr>
+              <a:t>Richard McElreath</a:t>
+            </a:r>
+          </a:p>
+        </p:txBody>
+      </p:sp>
     </p:spTree>
     <p:extLst>
       <p:ext uri="{BB962C8B-B14F-4D97-AF65-F5344CB8AC3E}">
